--- a/telco-credit/outputs/dcb_deck_fa.pptx
+++ b/telco-credit/outputs/dcb_deck_fa.pptx
@@ -7,6 +7,7 @@
   <p:sldIdLst>
     <p:sldId id="256" r:id="rId7"/>
     <p:sldId id="257" r:id="rId9"/>
+    <p:sldId id="258" r:id="rId10"/>
   </p:sldIdLst>
   <p:sldSz cx="12191695" cy="6858000" type="screen4x3"/>
   <p:notesSz cx="6858000" cy="9144000"/>
@@ -535,6 +536,82 @@
 </file>
 
 <file path=ppt/notesSlides/notesSlide2.xml><?xml version="1.0" encoding="utf-8"?>
+<p:notes xmlns:a="http://schemas.openxmlformats.org/drawingml/2006/main" xmlns:p="http://schemas.openxmlformats.org/presentationml/2006/main" xmlns:r="http://schemas.openxmlformats.org/officeDocument/2006/relationships">
+  <p:cSld>
+    <p:spTree>
+      <p:nvGrpSpPr>
+        <p:cNvPr id="1" name=""/>
+        <p:cNvGrpSpPr/>
+        <p:nvPr/>
+      </p:nvGrpSpPr>
+      <p:grpSpPr>
+        <a:xfrm>
+          <a:off x="0" y="0"/>
+          <a:ext cx="0" cy="0"/>
+          <a:chOff x="0" y="0"/>
+          <a:chExt cx="0" cy="0"/>
+        </a:xfrm>
+      </p:grpSpPr>
+      <p:sp>
+        <p:nvSpPr>
+          <p:cNvPr id="2" name="Slide Image Placeholder 1"/>
+          <p:cNvSpPr>
+            <a:spLocks noGrp="1"/>
+          </p:cNvSpPr>
+          <p:nvPr>
+            <p:ph type="sldImg" idx="2"/>
+          </p:nvPr>
+        </p:nvSpPr>
+        <p:spPr/>
+      </p:sp>
+      <p:sp>
+        <p:nvSpPr>
+          <p:cNvPr id="3" name="Notes Placeholder 2"/>
+          <p:cNvSpPr>
+            <a:spLocks noGrp="1"/>
+          </p:cNvSpPr>
+          <p:nvPr>
+            <p:ph type="body" idx="3" sz="quarter"/>
+          </p:nvPr>
+        </p:nvSpPr>
+        <p:spPr/>
+        <p:txBody>
+          <a:bodyPr/>
+          <a:lstStyle/>
+          <a:p>
+            <a:r>
+              <a:t>مدل‌ها — چه چیزی آزموده شد و چه چیزی انتخاب شد</a:t>
+            </a:r>
+          </a:p>
+          <a:p/>
+          <a:p>
+            <a:r>
+              <a:t>دو مدل روی همان تفکیک آموزش دیدند. مبنا یک کارت امتیازی لجستیک روی ویژگی‌های WOE با AUC ۰٫۷۸۴۳ روی دادهٔ اعتبارسنجی؛ چالشگر گرادیان بوستینگ درختی (HistGradientBoosting، ۴۰۰ درخت، عمق ۵) با ۰٫۸۱۵۷. چالشگر ۰٫۰۳۱۴ بهتر بود و انتخاب شد. روی دادهٔ کنارگذاشته: AUC ۰٫۸۲۷۸، جینی ۰٫۶۵۵۷، KS ۰٫۵۱۵۱، خطای سطح کالیبراسیون ۱٫۷ درصد. آموزش روی ۸٬۷۰۱٬۰۸۵ سطر با ۴۵٬۳۶۱ مورد بد (۰٫۵۲ درصد) و ۳۹ ویژگی؛ تفکیک ۷۰ به ۳۰ با هش روی شناسهٔ مشترک؛ کالیبراسیون ایزوتونیک روی نیمی از اعتبارسنجی. بیشترین سهم از سابقهٔ قطع سرویس سال قبل است: ۰٫۰۲۳۹ از AUC، یعنی ۹۲ درصد کل بهبود بازآموزی. سه هشدار: رانش در ۱۲ ویژگی پس رتبه‌بندی معتبرتر از سطح است؛ کالیبراسیون در دهک‌های امن محافظه‌کار است؛ و سطح اعداد تا اجرای آزمایشی تأیید نمی‌شود.</a:t>
+            </a:r>
+          </a:p>
+        </p:txBody>
+      </p:sp>
+      <p:sp>
+        <p:nvSpPr>
+          <p:cNvPr id="4" name="Slide Number Placeholder 3"/>
+          <p:cNvSpPr>
+            <a:spLocks noGrp="1"/>
+          </p:cNvSpPr>
+          <p:nvPr>
+            <p:ph type="sldNum" idx="5" sz="quarter"/>
+          </p:nvPr>
+        </p:nvSpPr>
+        <p:spPr/>
+      </p:sp>
+    </p:spTree>
+  </p:cSld>
+  <p:clrMapOvr>
+    <a:masterClrMapping/>
+  </p:clrMapOvr>
+</p:notes>
+</file>
+
+<file path=ppt/notesSlides/notesSlide3.xml><?xml version="1.0" encoding="utf-8"?>
 <p:notes xmlns:a="http://schemas.openxmlformats.org/drawingml/2006/main" xmlns:p="http://schemas.openxmlformats.org/presentationml/2006/main" xmlns:r="http://schemas.openxmlformats.org/officeDocument/2006/relationships">
   <p:cSld>
     <p:spTree>
@@ -3624,6 +3701,48 @@
 </file>
 
 <file path=ppt/slides/slide2.xml><?xml version="1.0" encoding="utf-8"?>
+<p:sld xmlns:a="http://schemas.openxmlformats.org/drawingml/2006/main" xmlns:p="http://schemas.openxmlformats.org/presentationml/2006/main" xmlns:r="http://schemas.openxmlformats.org/officeDocument/2006/relationships">
+  <p:cSld>
+    <p:spTree>
+      <p:nvGrpSpPr>
+        <p:cNvPr id="1" name=""/>
+        <p:cNvGrpSpPr/>
+        <p:nvPr/>
+      </p:nvGrpSpPr>
+      <p:grpSpPr/>
+      <p:pic>
+        <p:nvPicPr>
+          <p:cNvPr id="2" name="مدل‌ها — چه چیزی آزموده شد و چه چیزی انتخاب شد" descr="دو مدل روی همان تفکیک آموزش دیدند. مبنا یک کارت امتیازی لجستیک روی ویژگی‌های WOE با AUC ۰٫۷۸۴۳ روی دادهٔ اعتبارسنجی؛ چالشگر گرادیان بوستینگ درختی (HistGradientBoosting، ۴۰۰ درخت، عمق ۵) با ۰٫۸۱۵۷. چالشگر ۰٫۰۳۱۴ بهتر بود و انتخاب شد. روی دادهٔ کنارگذاشته: AUC ۰٫۸۲۷۸، جینی ۰٫۶۵۵۷، KS ۰٫۵۱۵۱، خطای سطح کالیبراسیون ۱٫۷ درصد. آموزش روی ۸٬۷۰۱٬۰۸۵ سطر با ۴۵٬۳۶۱ مورد بد (۰٫۵۲ درصد) و ۳۹ ویژگی؛ تفکیک ۷۰ به ۳۰ با هش روی شناسهٔ مشترک؛ کالیبراسیون ایزوتونیک روی نیمی از اعتبارسنجی. بیشترین سهم از سابقهٔ قطع سرویس سال قبل است: ۰٫۰۲۳۹ از AUC، یعنی ۹۲ درصد کل بهبود بازآموزی. سه هشدار: رانش در ۱۲ ویژگی پس رتبه‌بندی معتبرتر از سطح است؛ کالیبراسیون در دهک‌های امن محافظه‌کار است؛ و سطح اعداد تا اجرای آزمایشی تأیید نمی‌شود."/>
+          <p:cNvPicPr>
+            <a:picLocks noChangeAspect="1"/>
+          </p:cNvPicPr>
+          <p:nvPr/>
+        </p:nvPicPr>
+        <p:blipFill>
+          <a:blip r:embed="rId2"/>
+          <a:stretch>
+            <a:fillRect/>
+          </a:stretch>
+        </p:blipFill>
+        <p:spPr>
+          <a:xfrm>
+            <a:off x="0" y="0"/>
+            <a:ext cx="12191695" cy="6858000"/>
+          </a:xfrm>
+          <a:prstGeom prst="rect">
+            <a:avLst/>
+          </a:prstGeom>
+        </p:spPr>
+      </p:pic>
+    </p:spTree>
+  </p:cSld>
+  <p:clrMapOvr>
+    <a:masterClrMapping/>
+  </p:clrMapOvr>
+</p:sld>
+</file>
+
+<file path=ppt/slides/slide3.xml><?xml version="1.0" encoding="utf-8"?>
 <p:sld xmlns:a="http://schemas.openxmlformats.org/drawingml/2006/main" xmlns:p="http://schemas.openxmlformats.org/presentationml/2006/main" xmlns:r="http://schemas.openxmlformats.org/officeDocument/2006/relationships">
   <p:cSld>
     <p:spTree>
